--- a/slide_rq3_dm_v3.pptx
+++ b/slide_rq3_dm_v3.pptx
@@ -3364,8 +3364,8 @@
                 </a:solidFill>
                 <a:latin typeface="Calibri"/>
               </a:rPr>
-              <a:t>A AUC = 0.841, C AUC = 0.840
-→ "C가 약간 낮네?" 라고만 보임
+              <a:t>A AUC ≈ C AUC (차이 0.00x 수준)
+→ "거의 같은데?" 라고만 보임
 → 이 차이가 우연인지, 진짜 차이인지 알 수 없음</a:t>
             </a:r>
           </a:p>
@@ -3582,7 +3582,7 @@
                 <a:latin typeface="Calibri"/>
               </a:rPr>
               <a:t>RQ3 핵심 주장:
-"5개 채널 대신 2개만 써도 충분하다"
+"5개 채널 대신 2~3개만 써도 충분하다"
 DM 검정 없이는 → 단순 AUC 비교
 DM 검정 있으면 → 통계적 동등성 입증
 = 간결성(parsimony) 근거 확보</a:t>
@@ -3892,7 +3892,7 @@
                           </a:solidFill>
                           <a:latin typeface="Calibri"/>
                         </a:rPr>
-                        <a:t>0.8401</a:t>
+                        <a:t>0.8458</a:t>
                       </a:r>
                     </a:p>
                   </a:txBody>
@@ -3915,7 +3915,7 @@
                           </a:solidFill>
                           <a:latin typeface="Calibri"/>
                         </a:rPr>
-                        <a:t>-0.417</a:t>
+                        <a:t>+1.916</a:t>
                       </a:r>
                     </a:p>
                   </a:txBody>
@@ -3938,7 +3938,7 @@
                           </a:solidFill>
                           <a:latin typeface="Calibri"/>
                         </a:rPr>
-                        <a:t>0.678</a:t>
+                        <a:t>0.057</a:t>
                       </a:r>
                     </a:p>
                   </a:txBody>
@@ -3962,7 +3962,7 @@
                           <a:latin typeface="Calibri"/>
                         </a:rPr>
                         <a:t>H₀ 기각 실패
-→ 동등</a:t>
+→ 동등(경계)</a:t>
                       </a:r>
                     </a:p>
                   </a:txBody>
@@ -4056,7 +4056,7 @@
                           </a:solidFill>
                           <a:latin typeface="Calibri"/>
                         </a:rPr>
-                        <a:t>0.8577</a:t>
+                        <a:t>0.8565</a:t>
                       </a:r>
                     </a:p>
                   </a:txBody>
@@ -4079,7 +4079,7 @@
                           </a:solidFill>
                           <a:latin typeface="Calibri"/>
                         </a:rPr>
-                        <a:t>-1.145</a:t>
+                        <a:t>+0.926</a:t>
                       </a:r>
                     </a:p>
                   </a:txBody>
@@ -4102,7 +4102,7 @@
                           </a:solidFill>
                           <a:latin typeface="Calibri"/>
                         </a:rPr>
-                        <a:t>0.254</a:t>
+                        <a:t>0.356</a:t>
                       </a:r>
                     </a:p>
                   </a:txBody>
@@ -4220,7 +4220,7 @@
                           </a:solidFill>
                           <a:latin typeface="Calibri"/>
                         </a:rPr>
-                        <a:t>0.9626</a:t>
+                        <a:t>0.9609</a:t>
                       </a:r>
                     </a:p>
                   </a:txBody>
@@ -4243,7 +4243,7 @@
                           </a:solidFill>
                           <a:latin typeface="Calibri"/>
                         </a:rPr>
-                        <a:t>+0.460</a:t>
+                        <a:t>+0.861</a:t>
                       </a:r>
                     </a:p>
                   </a:txBody>
@@ -4266,7 +4266,7 @@
                           </a:solidFill>
                           <a:latin typeface="Calibri"/>
                         </a:rPr>
-                        <a:t>0.646</a:t>
+                        <a:t>0.390</a:t>
                       </a:r>
                     </a:p>
                   </a:txBody>
